--- a/output/archive/QuenverellData/marketing/capabilities/2018/quenverell-bioinformatics-capabilities-v3-2018.pptx
+++ b/output/archive/QuenverellData/marketing/capabilities/2018/quenverell-bioinformatics-capabilities-v3-2018.pptx
@@ -4507,16 +4507,48 @@
           </a:p>
         </p:txBody>
       </p:sp>
+      <p:sp>
+        <p:nvSpPr>
+          <p:cNvPr id="4" name="TextBox 3"/>
+          <p:cNvSpPr txBox="1"/>
+          <p:nvPr/>
+        </p:nvSpPr>
+        <p:spPr>
+          <a:xfrm>
+            <a:off x="457200" y="1280160"/>
+            <a:ext cx="11277295" cy="1097280"/>
+          </a:xfrm>
+          <a:prstGeom prst="rect">
+            <a:avLst/>
+          </a:prstGeom>
+          <a:noFill/>
+        </p:spPr>
+        <p:txBody>
+          <a:bodyPr wrap="square">
+            <a:noAutofit/>
+          </a:bodyPr>
+          <a:lstStyle/>
+          <a:p>
+            <a:pPr/>
+            <a:r>
+              <a:rPr sz="1600">
+                <a:latin typeface="Times New Roman"/>
+              </a:rPr>
+              <a:t>Scope and timing agreed after data acceptance</a:t>
+            </a:r>
+          </a:p>
+        </p:txBody>
+      </p:sp>
       <p:graphicFrame>
         <p:nvGraphicFramePr>
-          <p:cNvPr id="4" name="Table 3"/>
+          <p:cNvPr id="5" name="Table 4"/>
           <p:cNvGraphicFramePr>
             <a:graphicFrameLocks noGrp="1"/>
           </p:cNvGraphicFramePr>
           <p:nvPr/>
         </p:nvGraphicFramePr>
         <p:xfrm>
-          <a:off x="457200" y="1280160"/>
+          <a:off x="457200" y="1783080"/>
           <a:ext cx="11277295" cy="1371600"/>
         </p:xfrm>
         <a:graphic>
@@ -4526,9 +4558,8 @@
                 <a:tableStyleId>{5C22544A-7EE6-4342-B048-85BDC9FD1C3A}</a:tableStyleId>
               </a:tblPr>
               <a:tblGrid>
-                <a:gridCol w="3759098"/>
-                <a:gridCol w="3759098"/>
-                <a:gridCol w="3759099"/>
+                <a:gridCol w="5638647"/>
+                <a:gridCol w="5638648"/>
               </a:tblGrid>
               <a:tr h="274320">
                 <a:tc>
@@ -4544,28 +4575,6 @@
                           <a:latin typeface="Times New Roman"/>
                         </a:rPr>
                         <a:t>Engagement</a:t>
-                      </a:r>
-                    </a:p>
-                  </a:txBody>
-                  <a:tcPr>
-                    <a:solidFill>
-                      <a:srgbClr val="41416E"/>
-                    </a:solidFill>
-                  </a:tcPr>
-                </a:tc>
-                <a:tc>
-                  <a:txBody>
-                    <a:bodyPr/>
-                    <a:lstStyle/>
-                    <a:p>
-                      <a:r>
-                        <a:rPr sz="1400" b="1">
-                          <a:solidFill>
-                            <a:srgbClr val="FFFFFF"/>
-                          </a:solidFill>
-                          <a:latin typeface="Times New Roman"/>
-                        </a:rPr>
-                        <a:t>Typical length</a:t>
                       </a:r>
                     </a:p>
                   </a:txBody>
@@ -4623,21 +4632,6 @@
                         <a:rPr sz="1400">
                           <a:latin typeface="Times New Roman"/>
                         </a:rPr>
-                        <a:t>6-10 weeks</a:t>
-                      </a:r>
-                    </a:p>
-                  </a:txBody>
-                  <a:tcPr/>
-                </a:tc>
-                <a:tc>
-                  <a:txBody>
-                    <a:bodyPr/>
-                    <a:lstStyle/>
-                    <a:p>
-                      <a:r>
-                        <a:rPr sz="1400">
-                          <a:latin typeface="Times New Roman"/>
-                        </a:rPr>
                         <a:t>Ranked list and readout</a:t>
                       </a:r>
                     </a:p>
@@ -4670,22 +4664,7 @@
                         <a:rPr sz="1400">
                           <a:latin typeface="Times New Roman"/>
                         </a:rPr>
-                        <a:t>3-6 weeks</a:t>
-                      </a:r>
-                    </a:p>
-                  </a:txBody>
-                  <a:tcPr/>
-                </a:tc>
-                <a:tc>
-                  <a:txBody>
-                    <a:bodyPr/>
-                    <a:lstStyle/>
-                    <a:p>
-                      <a:r>
-                        <a:rPr sz="1400">
-                          <a:latin typeface="Times New Roman"/>
-                        </a:rPr>
-                        <a:t>DE results and report</a:t>
+                        <a:t>Differential expression results and report</a:t>
                       </a:r>
                     </a:p>
                   </a:txBody>
@@ -4703,21 +4682,6 @@
                           <a:latin typeface="Times New Roman"/>
                         </a:rPr>
                         <a:t>Biomarker support</a:t>
-                      </a:r>
-                    </a:p>
-                  </a:txBody>
-                  <a:tcPr/>
-                </a:tc>
-                <a:tc>
-                  <a:txBody>
-                    <a:bodyPr/>
-                    <a:lstStyle/>
-                    <a:p>
-                      <a:r>
-                        <a:rPr sz="1400">
-                          <a:latin typeface="Times New Roman"/>
-                        </a:rPr>
-                        <a:t>8-12 weeks</a:t>
                       </a:r>
                     </a:p>
                   </a:txBody>
@@ -4764,21 +4728,6 @@
                         <a:rPr sz="1400">
                           <a:latin typeface="Times New Roman"/>
                         </a:rPr>
-                        <a:t>4-8 weeks</a:t>
-                      </a:r>
-                    </a:p>
-                  </a:txBody>
-                  <a:tcPr/>
-                </a:tc>
-                <a:tc>
-                  <a:txBody>
-                    <a:bodyPr/>
-                    <a:lstStyle/>
-                    <a:p>
-                      <a:r>
-                        <a:rPr sz="1400">
-                          <a:latin typeface="Times New Roman"/>
-                        </a:rPr>
                         <a:t>Prioritised compounds</a:t>
                       </a:r>
                     </a:p>
@@ -4792,7 +4741,7 @@
       </p:graphicFrame>
       <p:sp>
         <p:nvSpPr>
-          <p:cNvPr id="5" name="TextBox 4"/>
+          <p:cNvPr id="6" name="TextBox 5"/>
           <p:cNvSpPr txBox="1"/>
           <p:nvPr/>
         </p:nvSpPr>
@@ -4902,7 +4851,7 @@
               <a:rPr sz="2000">
                 <a:latin typeface="Times New Roman"/>
               </a:rPr>
-              <a:t>Client had 25 candidate genes and budget for three assays</a:t>
+              <a:t>Client had more candidate genes than assay budget</a:t>
             </a:r>
           </a:p>
           <a:p>
@@ -4911,7 +4860,7 @@
               <a:rPr sz="2000">
                 <a:latin typeface="Times New Roman"/>
               </a:rPr>
-              <a:t>Expression in patient tissue and genetic evidence combined</a:t>
+              <a:t>Combined patient-tissue expression and genetic evidence to recommend a shortlist for cell assays</a:t>
             </a:r>
           </a:p>
           <a:p>
@@ -4920,7 +4869,7 @@
               <a:rPr sz="2000">
                 <a:latin typeface="Times New Roman"/>
               </a:rPr>
-              <a:t>Three targets recommended; one later confirmed in cell assays</a:t>
+              <a:t>Follow-up testing supported one candidate</a:t>
             </a:r>
           </a:p>
           <a:p>
@@ -6388,7 +6337,7 @@
               <a:rPr sz="1800">
                 <a:latin typeface="Times New Roman"/>
               </a:rPr>
-              <a:t>QC, alignment and quantification</a:t>
+              <a:t>Data acceptance, alignment and quantification</a:t>
             </a:r>
           </a:p>
           <a:p>
@@ -6447,7 +6396,7 @@
               <a:rPr sz="1800">
                 <a:latin typeface="Times New Roman"/>
               </a:rPr>
-              <a:t>QC report</a:t>
+              <a:t>Data acceptance report</a:t>
             </a:r>
           </a:p>
           <a:p>
